--- a/docs/competition/02_复赛方案.pptx
+++ b/docs/competition/02_复赛方案.pptx
@@ -3360,7 +3360,7 @@
                 </a:solidFill>
                 <a:latin typeface="微软雅黑"/>
               </a:rPr>
-              <a:t>实测：事项分类留一验证 100%｜主办单位推荐 94.4%（通用做法仅 5.6%）｜单案 30 秒级（人工基准约 20 分钟）</a:t>
+              <a:t>实测：事项分类留一验证 100%｜主办单位推荐 94.4%（通用做法仅 5.6%）｜单案 35–70 秒（人工工序基准约 20 分钟，估算）</a:t>
             </a:r>
           </a:p>
         </p:txBody>
@@ -6857,7 +6857,7 @@
                 </a:solidFill>
                 <a:latin typeface="微软雅黑"/>
               </a:rPr>
-              <a:t>效率对比：单案智能体 30 秒级（含五节点）vs 人工工序基准约 20 分钟；开启双模型复核时为 110–137 秒（可配置）。</a:t>
+              <a:t>效率对比：单案五节点全链路 35–70 秒（实测 34.5s / 68.5s，随模型延迟波动）vs 人工工序基准约 20 分钟（8′+4′+8′ 估算）；开启双模型交叉复核时 110–137 秒（可配置关闭）。</a:t>
             </a:r>
           </a:p>
           <a:p>
@@ -7844,7 +7844,7 @@
         <p:spPr>
           <a:xfrm>
             <a:off x="8138159" y="4526280"/>
-            <a:ext cx="382612" cy="1417320"/>
+            <a:ext cx="371639" cy="1417320"/>
           </a:xfrm>
           <a:prstGeom prst="rect">
             <a:avLst/>

--- a/docs/competition/02_复赛方案.pptx
+++ b/docs/competition/02_复赛方案.pptx
@@ -3787,7 +3787,7 @@
                 </a:solidFill>
                 <a:latin typeface="微软雅黑"/>
               </a:rPr>
-              <a:t>· 一次调用问完全案 10 个判断（长 state 只发一次）</a:t>
+              <a:t>· 已接通四个判断点：分类 / 急件 / 派单 / 合规</a:t>
             </a:r>
           </a:p>
           <a:p>
@@ -3806,7 +3806,7 @@
                 </a:solidFill>
                 <a:latin typeface="微软雅黑"/>
               </a:rPr>
-              <a:t>· 已实现：契约照官方 OpenAPI、失败自动回退</a:t>
+              <a:t>· 契约照官方 OpenAPI；未配置或失败自动回退（零回归）</a:t>
             </a:r>
           </a:p>
         </p:txBody>

--- a/docs/competition/02_复赛方案.pptx
+++ b/docs/competition/02_复赛方案.pptx
@@ -3663,7 +3663,7 @@
                 </a:solidFill>
                 <a:latin typeface="微软雅黑"/>
               </a:rPr>
-              <a:t>System One 决策模型（Jev）</a:t>
+              <a:t>System One 决策模型（已本地部署开源实现）</a:t>
             </a:r>
           </a:p>
         </p:txBody>
@@ -3768,7 +3768,7 @@
                 </a:solidFill>
                 <a:latin typeface="微软雅黑"/>
               </a:rPr>
-              <a:t>· Noul / Choice / Score 三类原语返回校准概率</a:t>
+              <a:t>· laya（Apache 2.0，322M）：本地 CPU 部署，647MB，$0 成本，1s/次</a:t>
             </a:r>
           </a:p>
           <a:p>
@@ -3787,7 +3787,7 @@
                 </a:solidFill>
                 <a:latin typeface="微软雅黑"/>
               </a:rPr>
-              <a:t>· 已接通四个判断点：分类 / 急件 / 派单 / 合规</a:t>
+              <a:t>· 已接通四个判断点：分类 / 急件 / 派单 / 合规（可开关）</a:t>
             </a:r>
           </a:p>
           <a:p>
@@ -3806,7 +3806,26 @@
                 </a:solidFill>
                 <a:latin typeface="微软雅黑"/>
               </a:rPr>
-              <a:t>· 契约照官方 OpenAPI；未配置或失败自动回退（零回归）</a:t>
+              <a:t>· 实测：中文零样本分类 22.2% → 不以它替代规则+生成模型；</a:t>
+            </a:r>
+          </a:p>
+          <a:p>
+            <a:pPr algn="l">
+              <a:lnSpc>
+                <a:spcPct val="125000"/>
+              </a:lnSpc>
+              <a:spcBef>
+                <a:spcPts val="600"/>
+              </a:spcBef>
+            </a:pPr>
+            <a:r>
+              <a:rPr sz="1050" b="0">
+                <a:solidFill>
+                  <a:srgbClr val="1C2430"/>
+                </a:solidFill>
+                <a:latin typeface="微软雅黑"/>
+              </a:rPr>
+              <a:t>· 隐私 Noul 有可用信号，决赛拟用积累数据微调</a:t>
             </a:r>
           </a:p>
         </p:txBody>

--- a/docs/competition/02_复赛方案.pptx
+++ b/docs/competition/02_复赛方案.pptx
@@ -3663,7 +3663,7 @@
                 </a:solidFill>
                 <a:latin typeface="微软雅黑"/>
               </a:rPr>
-              <a:t>System One 决策模型（已本地部署开源实现）</a:t>
+              <a:t>System One 决策模型（开源 + 闭源双通道实测）</a:t>
             </a:r>
           </a:p>
         </p:txBody>
@@ -3749,7 +3749,7 @@
                 </a:solidFill>
                 <a:latin typeface="微软雅黑"/>
               </a:rPr>
-              <a:t>· 判断交给决策模型、写作交给生成模型</a:t>
+              <a:t>· laya（Apache 2.0，322M）本地 CPU：647MB / $0 / ~1s</a:t>
             </a:r>
           </a:p>
           <a:p>
@@ -3768,7 +3768,7 @@
                 </a:solidFill>
                 <a:latin typeface="微软雅黑"/>
               </a:rPr>
-              <a:t>· laya（Apache 2.0，322M）：本地 CPU 部署，647MB，$0 成本，1s/次</a:t>
+              <a:t>· JEV（TypeSafe，OpenRouter alpha）：603ms / $0.00011 每案</a:t>
             </a:r>
           </a:p>
           <a:p>
@@ -3787,7 +3787,7 @@
                 </a:solidFill>
                 <a:latin typeface="微软雅黑"/>
               </a:rPr>
-              <a:t>· 已接通四个判断点：分类 / 急件 / 派单 / 合规（可开关）</a:t>
+              <a:t>· 同集 18 条：JEV 分类 100%，laya 22.2%（随机 8.3%）</a:t>
             </a:r>
           </a:p>
           <a:p>
@@ -3806,7 +3806,7 @@
                 </a:solidFill>
                 <a:latin typeface="微软雅黑"/>
               </a:rPr>
-              <a:t>· 实测：中文零样本分类 22.2% → 不以它替代规则+生成模型；</a:t>
+              <a:t>· 门控 auto/human：JEV 16/0 vs laya 1/15（后者即人工队列）</a:t>
             </a:r>
           </a:p>
           <a:p>
@@ -3825,7 +3825,26 @@
                 </a:solidFill>
                 <a:latin typeface="微软雅黑"/>
               </a:rPr>
-              <a:t>· 隐私 Noul 有可用信号，决赛拟用积累数据微调</a:t>
+              <a:t>· 归因实验排除 CPU：选项改英文后 16.7%→44.4%</a:t>
+            </a:r>
+          </a:p>
+          <a:p>
+            <a:pPr algn="l">
+              <a:lnSpc>
+                <a:spcPct val="125000"/>
+              </a:lnSpc>
+              <a:spcBef>
+                <a:spcPts val="600"/>
+              </a:spcBef>
+            </a:pPr>
+            <a:r>
+              <a:rPr sz="1050" b="0">
+                <a:solidFill>
+                  <a:srgbClr val="1C2430"/>
+                </a:solidFill>
+                <a:latin typeface="微软雅黑"/>
+              </a:rPr>
+              <a:t>· 定位：判断以规则为主，决策模型补语义 + 门控交人工</a:t>
             </a:r>
           </a:p>
         </p:txBody>
